--- a/HR_Block_PE_Investment_Committee_Pitch.pptx
+++ b/HR_Block_PE_Investment_Committee_Pitch.pptx
@@ -1738,7 +1738,7 @@
                 <a:ea typeface="Aptos" pitchFamily="34" charset="-122"/>
                 <a:cs typeface="Aptos" pitchFamily="34" charset="-120"/>
               </a:rPr>
-              <a:t>PUBLIC-TO-PRIVATE | INVESTMENT COMMITTEE</a:t>
+              <a:t>PUBLIC-TO-PRIVATE INVESTMENT COMMITTEE</a:t>
             </a:r>
             <a:endParaRPr lang="en-US" sz="1200" dirty="0"/>
           </a:p>
@@ -1820,7 +1820,7 @@
                 <a:ea typeface="Aptos" pitchFamily="34" charset="-122"/>
                 <a:cs typeface="Aptos" pitchFamily="34" charset="-120"/>
               </a:rPr>
-              <a:t>The price of predictable cash flow</a:t>
+              <a:t>Five-year leveraged buyout analysis</a:t>
             </a:r>
             <a:endParaRPr lang="en-US" sz="2400" dirty="0"/>
           </a:p>
@@ -1972,7 +1972,7 @@
                 <a:ea typeface="Aptos" pitchFamily="34" charset="-122"/>
                 <a:cs typeface="Aptos" pitchFamily="34" charset="-120"/>
               </a:rPr>
-              <a:t>16.7% modeled base IRR  |  20% investment hurdle</a:t>
+              <a:t>16.7% modeled base IRR vs. 20% investment hurdle</a:t>
             </a:r>
             <a:endParaRPr lang="en-US" sz="2200" dirty="0"/>
           </a:p>
@@ -2013,7 +2013,7 @@
                 <a:ea typeface="Aptos" pitchFamily="34" charset="-122"/>
                 <a:cs typeface="Aptos" pitchFamily="34" charset="-120"/>
               </a:rPr>
-              <a:t>Hypothetical transaction  •  22 October 2026  •  US$ millions unless noted</a:t>
+              <a:t>Hypothetical transaction. 22 October 2026. US$ millions unless noted</a:t>
             </a:r>
             <a:endParaRPr lang="en-US" sz="1100" dirty="0"/>
           </a:p>
@@ -2113,7 +2113,7 @@
                 <a:ea typeface="Aptos" pitchFamily="34" charset="-122"/>
                 <a:cs typeface="Aptos" pitchFamily="34" charset="-120"/>
               </a:rPr>
-              <a:t>PRIVATE EQUITY | INVESTMENT COMMITTEE</a:t>
+              <a:t>PRIVATE EQUITY INVESTMENT COMMITTEE</a:t>
             </a:r>
             <a:endParaRPr lang="en-US" sz="910" dirty="0"/>
           </a:p>
@@ -2154,7 +2154,7 @@
                 <a:ea typeface="Aptos" pitchFamily="34" charset="-122"/>
                 <a:cs typeface="Aptos" pitchFamily="34" charset="-120"/>
               </a:rPr>
-              <a:t>Final recommendation: pass—and retain the target on a watchlist</a:t>
+              <a:t>Recommendation: pass at the modeled entry price</a:t>
             </a:r>
             <a:endParaRPr lang="en-US" sz="2600" dirty="0"/>
           </a:p>
@@ -2218,7 +2218,7 @@
                 <a:ea typeface="Aptos" pitchFamily="34" charset="-122"/>
                 <a:cs typeface="Aptos" pitchFamily="34" charset="-120"/>
               </a:rPr>
-              <a:t>H&amp;R BLOCK  •  22 OCT 2026  •  ILLUSTRATIVE / NOT AN OFFER</a:t>
+              <a:t>H&amp;R BLOCK, 22 OCT 2026</a:t>
             </a:r>
             <a:endParaRPr lang="en-US" sz="800" dirty="0"/>
           </a:p>
@@ -2397,7 +2397,7 @@
                 <a:ea typeface="Aptos" pitchFamily="34" charset="-122"/>
                 <a:cs typeface="Aptos" pitchFamily="34" charset="-120"/>
               </a:rPr>
-              <a:t>Quality asset ≠ quality buyout</a:t>
+              <a:t>Base return falls below the hurdle</a:t>
             </a:r>
             <a:endParaRPr lang="en-US" sz="1500" dirty="0"/>
           </a:p>
@@ -2438,7 +2438,7 @@
                 <a:ea typeface="Aptos" pitchFamily="34" charset="-122"/>
                 <a:cs typeface="Aptos" pitchFamily="34" charset="-120"/>
               </a:rPr>
-              <a:t>At $8.25bn entry EV and 4.5x funded leverage, the base case earns only 16.7%.</a:t>
+              <a:t>At $8.25bn entry EV and 4.5x funded leverage, the base case earns 16.7%.</a:t>
             </a:r>
             <a:endParaRPr lang="en-US" sz="1200" dirty="0"/>
           </a:p>
@@ -2506,7 +2506,7 @@
                 <a:ea typeface="Aptos" pitchFamily="34" charset="-122"/>
                 <a:cs typeface="Aptos" pitchFamily="34" charset="-120"/>
               </a:rPr>
-              <a:t>Reopen if one of three conditions changes</a:t>
+              <a:t>Conditions for reconsideration</a:t>
             </a:r>
             <a:endParaRPr lang="en-US" sz="1500" dirty="0"/>
           </a:p>
@@ -2547,7 +2547,7 @@
                 <a:ea typeface="Aptos" pitchFamily="34" charset="-122"/>
                 <a:cs typeface="Aptos" pitchFamily="34" charset="-120"/>
               </a:rPr>
-              <a:t>Lower price (~16.5% premium), independently verified higher cash flow, or a demonstrably more attractive financing structure.</a:t>
+              <a:t>A lower price (about 16.23% premium), verified higher cash flow or better financing terms could justify reconsideration.</a:t>
             </a:r>
             <a:endParaRPr lang="en-US" sz="1200" dirty="0"/>
           </a:p>
@@ -2615,7 +2615,7 @@
                 <a:ea typeface="Aptos" pitchFamily="34" charset="-122"/>
                 <a:cs typeface="Aptos" pitchFamily="34" charset="-120"/>
               </a:rPr>
-              <a:t>Case-study diligence discipline</a:t>
+              <a:t>Further diligence</a:t>
             </a:r>
             <a:endParaRPr lang="en-US" sz="1500" dirty="0"/>
           </a:p>
@@ -2656,7 +2656,7 @@
                 <a:ea typeface="Aptos" pitchFamily="34" charset="-122"/>
                 <a:cs typeface="Aptos" pitchFamily="34" charset="-120"/>
               </a:rPr>
-              <a:t>Underwrite annualized sponsor returns, cash seasonality, lender terms and downside recovery—not just EBITDA growth.</a:t>
+              <a:t>Before investing, I would test annualized sponsor returns, seasonal cash needs, lender terms and downside recovery.</a:t>
             </a:r>
             <a:endParaRPr lang="en-US" sz="1200" dirty="0"/>
           </a:p>
@@ -2797,7 +2797,7 @@
                 <a:ea typeface="Aptos" pitchFamily="34" charset="-122"/>
                 <a:cs typeface="Aptos" pitchFamily="34" charset="-120"/>
               </a:rPr>
-              <a:t>PRIVATE EQUITY | INVESTMENT COMMITTEE</a:t>
+              <a:t>PRIVATE EQUITY INVESTMENT COMMITTEE</a:t>
             </a:r>
             <a:endParaRPr lang="en-US" sz="910" dirty="0"/>
           </a:p>
@@ -2838,7 +2838,7 @@
                 <a:ea typeface="Aptos" pitchFamily="34" charset="-122"/>
                 <a:cs typeface="Aptos" pitchFamily="34" charset="-120"/>
               </a:rPr>
-              <a:t>The investment decision</a:t>
+              <a:t>Investment recommendation</a:t>
             </a:r>
             <a:endParaRPr lang="en-US" sz="2600" dirty="0"/>
           </a:p>
@@ -2902,7 +2902,7 @@
                 <a:ea typeface="Aptos" pitchFamily="34" charset="-122"/>
                 <a:cs typeface="Aptos" pitchFamily="34" charset="-120"/>
               </a:rPr>
-              <a:t>H&amp;R BLOCK  •  22 OCT 2026  •  ILLUSTRATIVE / NOT AN OFFER</a:t>
+              <a:t>H&amp;R BLOCK, 22 OCT 2026</a:t>
             </a:r>
             <a:endParaRPr lang="en-US" sz="800" dirty="0"/>
           </a:p>
@@ -3550,7 +3550,7 @@
                 <a:ea typeface="Aptos" pitchFamily="34" charset="-122"/>
                 <a:cs typeface="Aptos" pitchFamily="34" charset="-120"/>
               </a:rPr>
-              <a:t>Investment committee verdict</a:t>
+              <a:t>Rationale</a:t>
             </a:r>
             <a:endParaRPr lang="en-US" sz="1600" dirty="0"/>
           </a:p>
@@ -3591,7 +3591,7 @@
                 <a:ea typeface="Aptos" pitchFamily="34" charset="-122"/>
                 <a:cs typeface="Aptos" pitchFamily="34" charset="-120"/>
               </a:rPr>
-              <a:t>At $62.60 per share (25% premium), financing costs and exit risk outweigh the cash-flow quality. Revisit only at a lower entry price or with demonstrated incremental free cash flow.</a:t>
+              <a:t>At $62.60 per share (25% premium), financing costs and exit risk leave the base return below the hurdle. I would reconsider at a lower price or with verified additional free cash flow.</a:t>
             </a:r>
             <a:endParaRPr lang="en-US" sz="1600" dirty="0"/>
           </a:p>
@@ -3732,7 +3732,7 @@
                 <a:ea typeface="Aptos" pitchFamily="34" charset="-122"/>
                 <a:cs typeface="Aptos" pitchFamily="34" charset="-120"/>
               </a:rPr>
-              <a:t>PRIVATE EQUITY | INVESTMENT COMMITTEE</a:t>
+              <a:t>PRIVATE EQUITY INVESTMENT COMMITTEE</a:t>
             </a:r>
             <a:endParaRPr lang="en-US" sz="910" dirty="0"/>
           </a:p>
@@ -3773,7 +3773,7 @@
                 <a:ea typeface="Aptos" pitchFamily="34" charset="-122"/>
                 <a:cs typeface="Aptos" pitchFamily="34" charset="-120"/>
               </a:rPr>
-              <a:t>A durable tax franchise—but not without substitution risk</a:t>
+              <a:t>Business fundamentals</a:t>
             </a:r>
             <a:endParaRPr lang="en-US" sz="2600" dirty="0"/>
           </a:p>
@@ -3837,7 +3837,7 @@
                 <a:ea typeface="Aptos" pitchFamily="34" charset="-122"/>
                 <a:cs typeface="Aptos" pitchFamily="34" charset="-120"/>
               </a:rPr>
-              <a:t>H&amp;R BLOCK  •  22 OCT 2026  •  ILLUSTRATIVE / NOT AN OFFER</a:t>
+              <a:t>H&amp;R BLOCK, 22 OCT 2026</a:t>
             </a:r>
             <a:endParaRPr lang="en-US" sz="800" dirty="0"/>
           </a:p>
@@ -4483,7 +4483,7 @@
                 <a:ea typeface="Aptos" pitchFamily="34" charset="-122"/>
                 <a:cs typeface="Aptos" pitchFamily="34" charset="-120"/>
               </a:rPr>
-              <a:t>Recurring compliance</a:t>
+              <a:t>Recurring tax demand</a:t>
             </a:r>
             <a:endParaRPr lang="en-US" sz="1500" dirty="0"/>
           </a:p>
@@ -4524,7 +4524,7 @@
                 <a:ea typeface="Aptos" pitchFamily="34" charset="-122"/>
                 <a:cs typeface="Aptos" pitchFamily="34" charset="-120"/>
               </a:rPr>
-              <a:t>Annual filings create habitual demand; complex customer needs support assisted tax preparation.</a:t>
+              <a:t>Annual filing requirements support recurring demand. Customers with complex returns may continue to use assisted tax preparation.</a:t>
             </a:r>
             <a:endParaRPr lang="en-US" sz="1200" dirty="0"/>
           </a:p>
@@ -4592,7 +4592,7 @@
                 <a:ea typeface="Aptos" pitchFamily="34" charset="-122"/>
                 <a:cs typeface="Aptos" pitchFamily="34" charset="-120"/>
               </a:rPr>
-              <a:t>Low reinvestment intensity</a:t>
+              <a:t>Low capital requirements</a:t>
             </a:r>
             <a:endParaRPr lang="en-US" sz="1500" dirty="0"/>
           </a:p>
@@ -4701,7 +4701,7 @@
                 <a:ea typeface="Aptos" pitchFamily="34" charset="-122"/>
                 <a:cs typeface="Aptos" pitchFamily="34" charset="-120"/>
               </a:rPr>
-              <a:t>Core tension</a:t>
+              <a:t>Pricing and volume</a:t>
             </a:r>
             <a:endParaRPr lang="en-US" sz="1500" dirty="0"/>
           </a:p>
@@ -4742,7 +4742,7 @@
                 <a:ea typeface="Aptos" pitchFamily="34" charset="-122"/>
                 <a:cs typeface="Aptos" pitchFamily="34" charset="-120"/>
               </a:rPr>
-              <a:t>Assisted revenue growth can reflect better pricing and ownership mix even with flat total assisted volume.</a:t>
+              <a:t>Higher prices and changes in ownership mix can increase assisted revenue even when total assisted volume stays flat.</a:t>
             </a:r>
             <a:endParaRPr lang="en-US" sz="1200" dirty="0"/>
           </a:p>
@@ -4883,7 +4883,7 @@
                 <a:ea typeface="Aptos" pitchFamily="34" charset="-122"/>
                 <a:cs typeface="Aptos" pitchFamily="34" charset="-120"/>
               </a:rPr>
-              <a:t>PRIVATE EQUITY | INVESTMENT COMMITTEE</a:t>
+              <a:t>PRIVATE EQUITY INVESTMENT COMMITTEE</a:t>
             </a:r>
             <a:endParaRPr lang="en-US" sz="910" dirty="0"/>
           </a:p>
@@ -4988,7 +4988,7 @@
                 <a:ea typeface="Aptos" pitchFamily="34" charset="-122"/>
                 <a:cs typeface="Aptos" pitchFamily="34" charset="-120"/>
               </a:rPr>
-              <a:t>H&amp;R BLOCK  •  22 OCT 2026  •  ILLUSTRATIVE / NOT AN OFFER</a:t>
+              <a:t>H&amp;R BLOCK, 22 OCT 2026</a:t>
             </a:r>
             <a:endParaRPr lang="en-US" sz="800" dirty="0"/>
           </a:p>
@@ -5851,7 +5851,7 @@
                 <a:ea typeface="Aptos" pitchFamily="34" charset="-122"/>
                 <a:cs typeface="Aptos" pitchFamily="34" charset="-120"/>
               </a:rPr>
-              <a:t>Senior notes: $1.58bn</a:t>
+              <a:t>Senior notes: $1.59bn</a:t>
             </a:r>
             <a:endParaRPr lang="en-US" sz="1300" dirty="0"/>
           </a:p>
@@ -6028,7 +6028,7 @@
                 <a:ea typeface="Aptos" pitchFamily="34" charset="-122"/>
                 <a:cs typeface="Aptos" pitchFamily="34" charset="-120"/>
               </a:rPr>
-              <a:t>Offer, debt sizing, fees and transaction terms are hypothetical. Sources/uses in linked Excel.</a:t>
+              <a:t>Offer, debt sizing, fees and transaction terms are hypothetical. The Excel model includes sources and uses.</a:t>
             </a:r>
             <a:endParaRPr lang="en-US" sz="820" dirty="0"/>
           </a:p>
@@ -6128,7 +6128,7 @@
                 <a:ea typeface="Aptos" pitchFamily="34" charset="-122"/>
                 <a:cs typeface="Aptos" pitchFamily="34" charset="-120"/>
               </a:rPr>
-              <a:t>PRIVATE EQUITY | INVESTMENT COMMITTEE</a:t>
+              <a:t>PRIVATE EQUITY INVESTMENT COMMITTEE</a:t>
             </a:r>
             <a:endParaRPr lang="en-US" sz="910" dirty="0"/>
           </a:p>
@@ -6169,7 +6169,7 @@
                 <a:ea typeface="Aptos" pitchFamily="34" charset="-122"/>
                 <a:cs typeface="Aptos" pitchFamily="34" charset="-120"/>
               </a:rPr>
-              <a:t>Base plan: 4% revenue growth and gradual margin gain</a:t>
+              <a:t>Base forecast: 4% growth and higher margins</a:t>
             </a:r>
             <a:endParaRPr lang="en-US" sz="2600" dirty="0"/>
           </a:p>
@@ -6233,7 +6233,7 @@
                 <a:ea typeface="Aptos" pitchFamily="34" charset="-122"/>
                 <a:cs typeface="Aptos" pitchFamily="34" charset="-120"/>
               </a:rPr>
-              <a:t>H&amp;R BLOCK  •  22 OCT 2026  •  ILLUSTRATIVE / NOT AN OFFER</a:t>
+              <a:t>H&amp;R BLOCK, 22 OCT 2026</a:t>
             </a:r>
             <a:endParaRPr lang="en-US" sz="800" dirty="0"/>
           </a:p>
@@ -7516,7 +7516,7 @@
                 <a:ea typeface="Aptos" pitchFamily="34" charset="-122"/>
                 <a:cs typeface="Aptos" pitchFamily="34" charset="-120"/>
               </a:rPr>
-              <a:t>2031 base: $4.84bn sales  •  28.2% EBITDA margin  •  $1.10bn year-end modeled cash</a:t>
+              <a:t>2031 base: $4.84bn sales, 28.2% EBITDA margin and $1.10bn year-end modeled cash</a:t>
             </a:r>
             <a:endParaRPr lang="en-US" sz="1200" dirty="0"/>
           </a:p>
@@ -7557,7 +7557,7 @@
                 <a:ea typeface="Aptos" pitchFamily="34" charset="-122"/>
                 <a:cs typeface="Aptos" pitchFamily="34" charset="-120"/>
               </a:rPr>
-              <a:t>FY2027 base uses H&amp;R Block FY2027 guidance midpoint; FY2028–2031 are analyst assumptions.</a:t>
+              <a:t>FY2027 base uses H&amp;R Block FY2027 guidance midpoint. FY2028–2031 are analyst assumptions.</a:t>
             </a:r>
             <a:endParaRPr lang="en-US" sz="820" dirty="0"/>
           </a:p>
@@ -7657,7 +7657,7 @@
                 <a:ea typeface="Aptos" pitchFamily="34" charset="-122"/>
                 <a:cs typeface="Aptos" pitchFamily="34" charset="-120"/>
               </a:rPr>
-              <a:t>PRIVATE EQUITY | INVESTMENT COMMITTEE</a:t>
+              <a:t>PRIVATE EQUITY INVESTMENT COMMITTEE</a:t>
             </a:r>
             <a:endParaRPr lang="en-US" sz="910" dirty="0"/>
           </a:p>
@@ -7698,7 +7698,7 @@
                 <a:ea typeface="Aptos" pitchFamily="34" charset="-122"/>
                 <a:cs typeface="Aptos" pitchFamily="34" charset="-120"/>
               </a:rPr>
-              <a:t>Equity creation depends on earnings growth and deleveraging</a:t>
+              <a:t>Exit equity value and sponsor proceeds</a:t>
             </a:r>
             <a:endParaRPr lang="en-US" sz="2600" dirty="0"/>
           </a:p>
@@ -7762,7 +7762,7 @@
                 <a:ea typeface="Aptos" pitchFamily="34" charset="-122"/>
                 <a:cs typeface="Aptos" pitchFamily="34" charset="-120"/>
               </a:rPr>
-              <a:t>H&amp;R BLOCK  •  22 OCT 2026  •  ILLUSTRATIVE / NOT AN OFFER</a:t>
+              <a:t>H&amp;R BLOCK, 22 OCT 2026</a:t>
             </a:r>
             <a:endParaRPr lang="en-US" sz="800" dirty="0"/>
           </a:p>
@@ -8936,7 +8936,7 @@
                 <a:ea typeface="Aptos" pitchFamily="34" charset="-122"/>
                 <a:cs typeface="Aptos" pitchFamily="34" charset="-120"/>
               </a:rPr>
-              <a:t>Cash retained after debt sweep is included in exit proceeds; seasonality and cash availability require diligence.</a:t>
+              <a:t>Exit proceeds include cash retained after the debt sweep. Seasonality and cash availability require further review.</a:t>
             </a:r>
             <a:endParaRPr lang="en-US" sz="820" dirty="0"/>
           </a:p>
@@ -9036,7 +9036,7 @@
                 <a:ea typeface="Aptos" pitchFamily="34" charset="-122"/>
                 <a:cs typeface="Aptos" pitchFamily="34" charset="-120"/>
               </a:rPr>
-              <a:t>PRIVATE EQUITY | INVESTMENT COMMITTEE</a:t>
+              <a:t>PRIVATE EQUITY INVESTMENT COMMITTEE</a:t>
             </a:r>
             <a:endParaRPr lang="en-US" sz="910" dirty="0"/>
           </a:p>
@@ -9077,7 +9077,7 @@
                 <a:ea typeface="Aptos" pitchFamily="34" charset="-122"/>
                 <a:cs typeface="Aptos" pitchFamily="34" charset="-120"/>
               </a:rPr>
-              <a:t>Return distribution: strong dispersion at the same entry price</a:t>
+              <a:t>Downside, base and upside returns</a:t>
             </a:r>
             <a:endParaRPr lang="en-US" sz="2600" dirty="0"/>
           </a:p>
@@ -9141,7 +9141,7 @@
                 <a:ea typeface="Aptos" pitchFamily="34" charset="-122"/>
                 <a:cs typeface="Aptos" pitchFamily="34" charset="-120"/>
               </a:rPr>
-              <a:t>H&amp;R BLOCK  •  22 OCT 2026  •  ILLUSTRATIVE / NOT AN OFFER</a:t>
+              <a:t>H&amp;R BLOCK, 22 OCT 2026</a:t>
             </a:r>
             <a:endParaRPr lang="en-US" sz="800" dirty="0"/>
           </a:p>
@@ -9702,7 +9702,7 @@
                 <a:ea typeface="Aptos" pitchFamily="34" charset="-122"/>
                 <a:cs typeface="Aptos" pitchFamily="34" charset="-120"/>
               </a:rPr>
-              <a:t>Illustrative exit multiples: 6.0x downside • 7.5x base • 9.0x upside</a:t>
+              <a:t>Illustrative exit multiples: 6.0x downside, 7.5x base and 9.0x upside</a:t>
             </a:r>
             <a:endParaRPr lang="en-US" sz="1200" dirty="0"/>
           </a:p>
@@ -9843,7 +9843,7 @@
                 <a:ea typeface="Aptos" pitchFamily="34" charset="-122"/>
                 <a:cs typeface="Aptos" pitchFamily="34" charset="-120"/>
               </a:rPr>
-              <a:t>PRIVATE EQUITY | INVESTMENT COMMITTEE</a:t>
+              <a:t>PRIVATE EQUITY INVESTMENT COMMITTEE</a:t>
             </a:r>
             <a:endParaRPr lang="en-US" sz="910" dirty="0"/>
           </a:p>
@@ -9884,7 +9884,7 @@
                 <a:ea typeface="Aptos" pitchFamily="34" charset="-122"/>
                 <a:cs typeface="Aptos" pitchFamily="34" charset="-120"/>
               </a:rPr>
-              <a:t>Entry discipline matters more than a good narrative</a:t>
+              <a:t>Acquisition premium sensitivity</a:t>
             </a:r>
             <a:endParaRPr lang="en-US" sz="2600" dirty="0"/>
           </a:p>
@@ -9948,7 +9948,7 @@
                 <a:ea typeface="Aptos" pitchFamily="34" charset="-122"/>
                 <a:cs typeface="Aptos" pitchFamily="34" charset="-120"/>
               </a:rPr>
-              <a:t>H&amp;R BLOCK  •  22 OCT 2026  •  ILLUSTRATIVE / NOT AN OFFER</a:t>
+              <a:t>H&amp;R BLOCK, 22 OCT 2026</a:t>
             </a:r>
             <a:endParaRPr lang="en-US" sz="800" dirty="0"/>
           </a:p>
@@ -10696,7 +10696,7 @@
                 <a:ea typeface="Aptos" pitchFamily="34" charset="-122"/>
                 <a:cs typeface="Aptos" pitchFamily="34" charset="-120"/>
               </a:rPr>
-              <a:t>~16.5% premium required to clear 20% base IRR, all else held constant</a:t>
+              <a:t>About 16.23% premium ($58.21/share) supports 20% base IRR</a:t>
             </a:r>
             <a:endParaRPr lang="en-US" sz="1300" dirty="0"/>
           </a:p>
@@ -10737,7 +10737,7 @@
                 <a:ea typeface="Aptos" pitchFamily="34" charset="-122"/>
                 <a:cs typeface="Aptos" pitchFamily="34" charset="-120"/>
               </a:rPr>
-              <a:t>Sensitivity isolates offer price; same FY2031 base operations and modeled debt paydown.</a:t>
+              <a:t>Sensitivity changes only the offer price, holding FY2031 base operations, financing assumptions and modeled debt paydown fixed.</a:t>
             </a:r>
             <a:endParaRPr lang="en-US" sz="820" dirty="0"/>
           </a:p>
@@ -10837,7 +10837,7 @@
                 <a:ea typeface="Aptos" pitchFamily="34" charset="-122"/>
                 <a:cs typeface="Aptos" pitchFamily="34" charset="-120"/>
               </a:rPr>
-              <a:t>PRIVATE EQUITY | INVESTMENT COMMITTEE</a:t>
+              <a:t>PRIVATE EQUITY INVESTMENT COMMITTEE</a:t>
             </a:r>
             <a:endParaRPr lang="en-US" sz="910" dirty="0"/>
           </a:p>
@@ -10878,7 +10878,7 @@
                 <a:ea typeface="Aptos" pitchFamily="34" charset="-122"/>
                 <a:cs typeface="Aptos" pitchFamily="34" charset="-120"/>
               </a:rPr>
-              <a:t>Risks that could break the model</a:t>
+              <a:t>Investment risks</a:t>
             </a:r>
             <a:endParaRPr lang="en-US" sz="2600" dirty="0"/>
           </a:p>
@@ -10942,7 +10942,7 @@
                 <a:ea typeface="Aptos" pitchFamily="34" charset="-122"/>
                 <a:cs typeface="Aptos" pitchFamily="34" charset="-120"/>
               </a:rPr>
-              <a:t>H&amp;R BLOCK  •  22 OCT 2026  •  ILLUSTRATIVE / NOT AN OFFER</a:t>
+              <a:t>H&amp;R BLOCK, 22 OCT 2026</a:t>
             </a:r>
             <a:endParaRPr lang="en-US" sz="800" dirty="0"/>
           </a:p>
@@ -11121,7 +11121,7 @@
                 <a:ea typeface="Aptos" pitchFamily="34" charset="-122"/>
                 <a:cs typeface="Aptos" pitchFamily="34" charset="-120"/>
               </a:rPr>
-              <a:t>February–April receipts dominate annual cash flow; monthly revolving-credit needs are omitted.</a:t>
+              <a:t>Most annual cash receipts arrive in February–April. The model omits monthly revolving-credit needs.</a:t>
             </a:r>
             <a:endParaRPr lang="en-US" sz="1200" dirty="0"/>
           </a:p>
@@ -11397,7 +11397,7 @@
                 <a:ea typeface="Aptos" pitchFamily="34" charset="-122"/>
                 <a:cs typeface="Aptos" pitchFamily="34" charset="-120"/>
               </a:rPr>
-              <a:t>8.5% first-lien / 9.5% notes are assumed, not bank commitments; covenants and tax shields are untested.</a:t>
+              <a:t>The model assumes 8.5% first-lien and 9.5% note rates without lender commitments. Covenants and tax shields require validation.</a:t>
             </a:r>
             <a:endParaRPr lang="en-US" sz="1200" dirty="0"/>
           </a:p>
@@ -11535,7 +11535,7 @@
                 <a:ea typeface="Aptos" pitchFamily="34" charset="-122"/>
                 <a:cs typeface="Aptos" pitchFamily="34" charset="-120"/>
               </a:rPr>
-              <a:t>$959mm June cash includes foreign balances; refinancing, legal exposures, and cash accessibility require review.</a:t>
+              <a:t>June cash of $959mm includes foreign balances. Refinancing, legal exposures and cash access require review.</a:t>
             </a:r>
             <a:endParaRPr lang="en-US" sz="1200" dirty="0"/>
           </a:p>
@@ -11576,7 +11576,7 @@
                 <a:ea typeface="Aptos" pitchFamily="34" charset="-122"/>
                 <a:cs typeface="Aptos" pitchFamily="34" charset="-120"/>
               </a:rPr>
-              <a:t>Tax season liquidity, real terms, and share dilution are deal-breaker diligence items.</a:t>
+              <a:t>Further diligence must establish tax-season liquidity, lender terms and the effect of share dilution.</a:t>
             </a:r>
             <a:endParaRPr lang="en-US" sz="820" dirty="0"/>
           </a:p>
